--- a/day-1/Using Kubernetes Day 1.pptx
+++ b/day-1/Using Kubernetes Day 1.pptx
@@ -284,7 +284,7 @@
           <a:p>
             <a:fld id="{4F1F2598-CD9E-4308-8C1F-F0CAB254D96E}" type="datetimeFigureOut">
               <a:rPr lang="en-US" smtClean="0"/>
-              <a:t>5/16/21</a:t>
+              <a:t>3/30/25</a:t>
             </a:fld>
             <a:endParaRPr lang="en-US"/>
           </a:p>
@@ -452,7 +452,7 @@
           <a:p>
             <a:fld id="{4F1F2598-CD9E-4308-8C1F-F0CAB254D96E}" type="datetimeFigureOut">
               <a:rPr lang="en-US" smtClean="0"/>
-              <a:t>5/16/21</a:t>
+              <a:t>3/30/25</a:t>
             </a:fld>
             <a:endParaRPr lang="en-US"/>
           </a:p>
@@ -630,7 +630,7 @@
           <a:p>
             <a:fld id="{4F1F2598-CD9E-4308-8C1F-F0CAB254D96E}" type="datetimeFigureOut">
               <a:rPr lang="en-US" smtClean="0"/>
-              <a:t>5/16/21</a:t>
+              <a:t>3/30/25</a:t>
             </a:fld>
             <a:endParaRPr lang="en-US"/>
           </a:p>
@@ -798,7 +798,7 @@
           <a:p>
             <a:fld id="{4F1F2598-CD9E-4308-8C1F-F0CAB254D96E}" type="datetimeFigureOut">
               <a:rPr lang="en-US" smtClean="0"/>
-              <a:t>5/16/21</a:t>
+              <a:t>3/30/25</a:t>
             </a:fld>
             <a:endParaRPr lang="en-US"/>
           </a:p>
@@ -1043,7 +1043,7 @@
           <a:p>
             <a:fld id="{4F1F2598-CD9E-4308-8C1F-F0CAB254D96E}" type="datetimeFigureOut">
               <a:rPr lang="en-US" smtClean="0"/>
-              <a:t>5/16/21</a:t>
+              <a:t>3/30/25</a:t>
             </a:fld>
             <a:endParaRPr lang="en-US"/>
           </a:p>
@@ -1272,7 +1272,7 @@
           <a:p>
             <a:fld id="{4F1F2598-CD9E-4308-8C1F-F0CAB254D96E}" type="datetimeFigureOut">
               <a:rPr lang="en-US" smtClean="0"/>
-              <a:t>5/16/21</a:t>
+              <a:t>3/30/25</a:t>
             </a:fld>
             <a:endParaRPr lang="en-US"/>
           </a:p>
@@ -1636,7 +1636,7 @@
           <a:p>
             <a:fld id="{4F1F2598-CD9E-4308-8C1F-F0CAB254D96E}" type="datetimeFigureOut">
               <a:rPr lang="en-US" smtClean="0"/>
-              <a:t>5/16/21</a:t>
+              <a:t>3/30/25</a:t>
             </a:fld>
             <a:endParaRPr lang="en-US"/>
           </a:p>
@@ -1753,7 +1753,7 @@
           <a:p>
             <a:fld id="{4F1F2598-CD9E-4308-8C1F-F0CAB254D96E}" type="datetimeFigureOut">
               <a:rPr lang="en-US" smtClean="0"/>
-              <a:t>5/16/21</a:t>
+              <a:t>3/30/25</a:t>
             </a:fld>
             <a:endParaRPr lang="en-US"/>
           </a:p>
@@ -1848,7 +1848,7 @@
           <a:p>
             <a:fld id="{4F1F2598-CD9E-4308-8C1F-F0CAB254D96E}" type="datetimeFigureOut">
               <a:rPr lang="en-US" smtClean="0"/>
-              <a:t>5/16/21</a:t>
+              <a:t>3/30/25</a:t>
             </a:fld>
             <a:endParaRPr lang="en-US"/>
           </a:p>
@@ -2123,7 +2123,7 @@
           <a:p>
             <a:fld id="{4F1F2598-CD9E-4308-8C1F-F0CAB254D96E}" type="datetimeFigureOut">
               <a:rPr lang="en-US" smtClean="0"/>
-              <a:t>5/16/21</a:t>
+              <a:t>3/30/25</a:t>
             </a:fld>
             <a:endParaRPr lang="en-US"/>
           </a:p>
@@ -2375,7 +2375,7 @@
           <a:p>
             <a:fld id="{4F1F2598-CD9E-4308-8C1F-F0CAB254D96E}" type="datetimeFigureOut">
               <a:rPr lang="en-US" smtClean="0"/>
-              <a:t>5/16/21</a:t>
+              <a:t>3/30/25</a:t>
             </a:fld>
             <a:endParaRPr lang="en-US"/>
           </a:p>
@@ -2586,7 +2586,7 @@
           <a:p>
             <a:fld id="{4F1F2598-CD9E-4308-8C1F-F0CAB254D96E}" type="datetimeFigureOut">
               <a:rPr lang="en-US" smtClean="0"/>
-              <a:t>5/16/21</a:t>
+              <a:t>3/30/25</a:t>
             </a:fld>
             <a:endParaRPr lang="en-US"/>
           </a:p>
@@ -3073,16 +3073,6 @@
           <a:lstStyle/>
           <a:p>
             <a:r>
-              <a:rPr lang="en-US" dirty="0" err="1">
-                <a:solidFill>
-                  <a:schemeClr val="accent1">
-                    <a:lumMod val="75000"/>
-                  </a:schemeClr>
-                </a:solidFill>
-              </a:rPr>
-              <a:t>Nesia</a:t>
-            </a:r>
-            <a:r>
               <a:rPr lang="en-US" dirty="0">
                 <a:solidFill>
                   <a:schemeClr val="accent1">
@@ -3090,7 +3080,7 @@
                   </a:schemeClr>
                 </a:solidFill>
               </a:rPr>
-              <a:t> Amit</a:t>
+              <a:t>Nesia Avivi</a:t>
             </a:r>
           </a:p>
         </p:txBody>
@@ -6238,9 +6228,10 @@
           <a:lstStyle/>
           <a:p>
             <a:r>
-              <a:rPr lang="en-US" sz="1600" dirty="0"/>
-              <a:t>http</a:t>
+              <a:rPr lang="en-US" sz="1600" dirty="0" err="1"/>
+              <a:t>grpc</a:t>
             </a:r>
+            <a:endParaRPr lang="en-US" sz="1600" dirty="0"/>
           </a:p>
         </p:txBody>
       </p:sp>
@@ -6296,9 +6287,10 @@
           <a:lstStyle/>
           <a:p>
             <a:r>
-              <a:rPr lang="en-US" sz="1600" dirty="0"/>
-              <a:t>http</a:t>
+              <a:rPr lang="en-US" sz="1600" dirty="0" err="1"/>
+              <a:t>grpc</a:t>
             </a:r>
+            <a:endParaRPr lang="en-US" sz="1600" dirty="0"/>
           </a:p>
         </p:txBody>
       </p:sp>
@@ -9708,19 +9700,27 @@
               <a:buNone/>
             </a:pPr>
             <a:r>
-              <a:rPr lang="en-US" sz="4000" b="1" dirty="0"/>
-              <a:t>The old way </a:t>
+              <a:rPr lang="en-US" sz="4000" i="1" dirty="0">
+                <a:solidFill>
+                  <a:schemeClr val="tx1">
+                    <a:lumMod val="50000"/>
+                    <a:lumOff val="50000"/>
+                  </a:schemeClr>
+                </a:solidFill>
+              </a:rPr>
+              <a:t>heavyweight, </a:t>
             </a:r>
             <a:r>
-              <a:rPr lang="en-US" sz="4000" dirty="0"/>
-              <a:t>to deploy applications</a:t>
+              <a:rPr lang="en-US" sz="4000" i="1">
+                <a:solidFill>
+                  <a:schemeClr val="tx1">
+                    <a:lumMod val="50000"/>
+                    <a:lumOff val="50000"/>
+                  </a:schemeClr>
+                </a:solidFill>
+              </a:rPr>
+              <a:t>no isolation, non-portable</a:t>
             </a:r>
-          </a:p>
-          <a:p>
-            <a:pPr marL="0" indent="0">
-              <a:buFont typeface="Arial" panose="020B0604020202020204" pitchFamily="34" charset="0"/>
-              <a:buNone/>
-            </a:pPr>
             <a:r>
               <a:rPr lang="en-US" sz="4000" i="1" dirty="0">
                 <a:solidFill>
@@ -9730,7 +9730,7 @@
                   </a:schemeClr>
                 </a:solidFill>
               </a:rPr>
-              <a:t>heavyweight, non-portable, Relies on OS package manager</a:t>
+              <a:t>, Relies on OS package manager</a:t>
             </a:r>
           </a:p>
         </p:txBody>
@@ -11566,9 +11566,10 @@
           <a:lstStyle/>
           <a:p>
             <a:r>
-              <a:rPr lang="en-US" sz="1600" dirty="0"/>
-              <a:t>http</a:t>
+              <a:rPr lang="en-US" sz="1600" dirty="0" err="1"/>
+              <a:t>grpc</a:t>
             </a:r>
+            <a:endParaRPr lang="en-US" sz="1600" dirty="0"/>
           </a:p>
         </p:txBody>
       </p:sp>
@@ -11988,9 +11989,10 @@
           <a:lstStyle/>
           <a:p>
             <a:r>
-              <a:rPr lang="en-US" sz="1600" dirty="0"/>
-              <a:t>http</a:t>
+              <a:rPr lang="en-US" sz="1600" dirty="0" err="1"/>
+              <a:t>grpc</a:t>
             </a:r>
+            <a:endParaRPr lang="en-US" sz="1600" dirty="0"/>
           </a:p>
         </p:txBody>
       </p:sp>
@@ -12121,7 +12123,7 @@
         </p:nvSpPr>
         <p:spPr>
           <a:xfrm>
-            <a:off x="1622138" y="1808126"/>
+            <a:off x="1622138" y="2067813"/>
             <a:ext cx="8595216" cy="2417631"/>
           </a:xfrm>
           <a:prstGeom prst="rect">
@@ -12307,20 +12309,6 @@
             <a:r>
               <a:rPr lang="en-US" sz="4000" dirty="0"/>
               <a:t>=</a:t>
-            </a:r>
-          </a:p>
-          <a:p>
-            <a:pPr marL="0" indent="0">
-              <a:buFont typeface="Arial" panose="020B0604020202020204" pitchFamily="34" charset="0"/>
-              <a:buNone/>
-            </a:pPr>
-            <a:r>
-              <a:rPr lang="en-US" sz="4000" b="1" dirty="0"/>
-              <a:t>The new way </a:t>
-            </a:r>
-            <a:r>
-              <a:rPr lang="en-US" sz="4000" dirty="0"/>
-              <a:t>to deploy applications</a:t>
             </a:r>
           </a:p>
           <a:p>
@@ -19671,7 +19659,7 @@
 </file>
 
 <file path=ppt/slides/slide21.xml><?xml version="1.0" encoding="utf-8"?>
-<p:sld xmlns:a="http://schemas.openxmlformats.org/drawingml/2006/main" xmlns:r="http://schemas.openxmlformats.org/officeDocument/2006/relationships" xmlns:p="http://schemas.openxmlformats.org/presentationml/2006/main">
+<p:sld xmlns:a="http://schemas.openxmlformats.org/drawingml/2006/main" xmlns:r="http://schemas.openxmlformats.org/officeDocument/2006/relationships" xmlns:p="http://schemas.openxmlformats.org/presentationml/2006/main" show="0">
   <p:cSld>
     <p:spTree>
       <p:nvGrpSpPr>
@@ -23213,7 +23201,7 @@
 </file>
 
 <file path=ppt/slides/slide23.xml><?xml version="1.0" encoding="utf-8"?>
-<p:sld xmlns:a="http://schemas.openxmlformats.org/drawingml/2006/main" xmlns:r="http://schemas.openxmlformats.org/officeDocument/2006/relationships" xmlns:p="http://schemas.openxmlformats.org/presentationml/2006/main">
+<p:sld xmlns:a="http://schemas.openxmlformats.org/drawingml/2006/main" xmlns:r="http://schemas.openxmlformats.org/officeDocument/2006/relationships" xmlns:p="http://schemas.openxmlformats.org/presentationml/2006/main" show="0">
   <p:cSld>
     <p:spTree>
       <p:nvGrpSpPr>
@@ -24930,7 +24918,7 @@
 </file>
 
 <file path=ppt/slides/slide24.xml><?xml version="1.0" encoding="utf-8"?>
-<p:sld xmlns:a="http://schemas.openxmlformats.org/drawingml/2006/main" xmlns:r="http://schemas.openxmlformats.org/officeDocument/2006/relationships" xmlns:p="http://schemas.openxmlformats.org/presentationml/2006/main">
+<p:sld xmlns:a="http://schemas.openxmlformats.org/drawingml/2006/main" xmlns:r="http://schemas.openxmlformats.org/officeDocument/2006/relationships" xmlns:p="http://schemas.openxmlformats.org/presentationml/2006/main" show="0">
   <p:cSld>
     <p:spTree>
       <p:nvGrpSpPr>
@@ -28540,7 +28528,7 @@
 </file>
 
 <file path=ppt/slides/slide26.xml><?xml version="1.0" encoding="utf-8"?>
-<p:sld xmlns:a="http://schemas.openxmlformats.org/drawingml/2006/main" xmlns:r="http://schemas.openxmlformats.org/officeDocument/2006/relationships" xmlns:p="http://schemas.openxmlformats.org/presentationml/2006/main">
+<p:sld xmlns:a="http://schemas.openxmlformats.org/drawingml/2006/main" xmlns:r="http://schemas.openxmlformats.org/officeDocument/2006/relationships" xmlns:p="http://schemas.openxmlformats.org/presentationml/2006/main" show="0">
   <p:cSld>
     <p:spTree>
       <p:nvGrpSpPr>
@@ -36671,6 +36659,13 @@
           </a:effectRef>
           <a:fontRef idx="minor"/>
         </p:style>
+        <p:txBody>
+          <a:bodyPr/>
+          <a:lstStyle/>
+          <a:p>
+            <a:endParaRPr lang="en-IL"/>
+          </a:p>
+        </p:txBody>
       </p:sp>
       <p:pic>
         <p:nvPicPr>
@@ -36735,6 +36730,13 @@
           </a:effectRef>
           <a:fontRef idx="minor"/>
         </p:style>
+        <p:txBody>
+          <a:bodyPr/>
+          <a:lstStyle/>
+          <a:p>
+            <a:endParaRPr lang="en-IL"/>
+          </a:p>
+        </p:txBody>
       </p:sp>
       <p:sp>
         <p:nvSpPr>
@@ -36774,6 +36776,13 @@
           </a:effectRef>
           <a:fontRef idx="minor"/>
         </p:style>
+        <p:txBody>
+          <a:bodyPr/>
+          <a:lstStyle/>
+          <a:p>
+            <a:endParaRPr lang="en-IL"/>
+          </a:p>
+        </p:txBody>
       </p:sp>
       <p:sp>
         <p:nvSpPr>
@@ -36815,6 +36824,13 @@
           </a:effectRef>
           <a:fontRef idx="minor"/>
         </p:style>
+        <p:txBody>
+          <a:bodyPr/>
+          <a:lstStyle/>
+          <a:p>
+            <a:endParaRPr lang="en-IL"/>
+          </a:p>
+        </p:txBody>
       </p:sp>
       <p:sp>
         <p:nvSpPr>
@@ -36854,6 +36870,13 @@
           </a:effectRef>
           <a:fontRef idx="minor"/>
         </p:style>
+        <p:txBody>
+          <a:bodyPr/>
+          <a:lstStyle/>
+          <a:p>
+            <a:endParaRPr lang="en-IL"/>
+          </a:p>
+        </p:txBody>
       </p:sp>
       <p:sp>
         <p:nvSpPr>
@@ -36895,6 +36918,13 @@
           </a:effectRef>
           <a:fontRef idx="minor"/>
         </p:style>
+        <p:txBody>
+          <a:bodyPr/>
+          <a:lstStyle/>
+          <a:p>
+            <a:endParaRPr lang="en-IL"/>
+          </a:p>
+        </p:txBody>
       </p:sp>
       <p:sp>
         <p:nvSpPr>
@@ -36934,6 +36964,13 @@
           </a:effectRef>
           <a:fontRef idx="minor"/>
         </p:style>
+        <p:txBody>
+          <a:bodyPr/>
+          <a:lstStyle/>
+          <a:p>
+            <a:endParaRPr lang="en-IL"/>
+          </a:p>
+        </p:txBody>
       </p:sp>
       <p:sp>
         <p:nvSpPr>
@@ -36971,6 +37008,13 @@
           </a:effectRef>
           <a:fontRef idx="minor"/>
         </p:style>
+        <p:txBody>
+          <a:bodyPr/>
+          <a:lstStyle/>
+          <a:p>
+            <a:endParaRPr lang="en-IL"/>
+          </a:p>
+        </p:txBody>
       </p:sp>
       <p:sp>
         <p:nvSpPr>
@@ -37103,6 +37147,13 @@
           </a:effectRef>
           <a:fontRef idx="minor"/>
         </p:style>
+        <p:txBody>
+          <a:bodyPr/>
+          <a:lstStyle/>
+          <a:p>
+            <a:endParaRPr lang="en-IL"/>
+          </a:p>
+        </p:txBody>
       </p:sp>
     </p:spTree>
     <p:extLst>
@@ -41122,7 +41173,7 @@
 </file>
 
 <file path=ppt/slides/slide4.xml><?xml version="1.0" encoding="utf-8"?>
-<p:sld xmlns:a="http://schemas.openxmlformats.org/drawingml/2006/main" xmlns:r="http://schemas.openxmlformats.org/officeDocument/2006/relationships" xmlns:p="http://schemas.openxmlformats.org/presentationml/2006/main">
+<p:sld xmlns:a="http://schemas.openxmlformats.org/drawingml/2006/main" xmlns:r="http://schemas.openxmlformats.org/officeDocument/2006/relationships" xmlns:p="http://schemas.openxmlformats.org/presentationml/2006/main" show="0">
   <p:cSld>
     <p:spTree>
       <p:nvGrpSpPr>
@@ -46442,7 +46493,7 @@
 </file>
 
 <file path=ppt/slides/slide5.xml><?xml version="1.0" encoding="utf-8"?>
-<p:sld xmlns:a="http://schemas.openxmlformats.org/drawingml/2006/main" xmlns:r="http://schemas.openxmlformats.org/officeDocument/2006/relationships" xmlns:p="http://schemas.openxmlformats.org/presentationml/2006/main">
+<p:sld xmlns:a="http://schemas.openxmlformats.org/drawingml/2006/main" xmlns:r="http://schemas.openxmlformats.org/officeDocument/2006/relationships" xmlns:p="http://schemas.openxmlformats.org/presentationml/2006/main" show="0">
   <p:cSld>
     <p:spTree>
       <p:nvGrpSpPr>
@@ -50714,7 +50765,7 @@
 </file>
 
 <file path=ppt/slides/slide6.xml><?xml version="1.0" encoding="utf-8"?>
-<p:sld xmlns:a="http://schemas.openxmlformats.org/drawingml/2006/main" xmlns:r="http://schemas.openxmlformats.org/officeDocument/2006/relationships" xmlns:p="http://schemas.openxmlformats.org/presentationml/2006/main">
+<p:sld xmlns:a="http://schemas.openxmlformats.org/drawingml/2006/main" xmlns:r="http://schemas.openxmlformats.org/officeDocument/2006/relationships" xmlns:p="http://schemas.openxmlformats.org/presentationml/2006/main" show="0">
   <p:cSld>
     <p:spTree>
       <p:nvGrpSpPr>
@@ -53893,7 +53944,7 @@
 </file>
 
 <file path=ppt/slides/slide7.xml><?xml version="1.0" encoding="utf-8"?>
-<p:sld xmlns:a="http://schemas.openxmlformats.org/drawingml/2006/main" xmlns:r="http://schemas.openxmlformats.org/officeDocument/2006/relationships" xmlns:p="http://schemas.openxmlformats.org/presentationml/2006/main">
+<p:sld xmlns:a="http://schemas.openxmlformats.org/drawingml/2006/main" xmlns:r="http://schemas.openxmlformats.org/officeDocument/2006/relationships" xmlns:p="http://schemas.openxmlformats.org/presentationml/2006/main" show="0">
   <p:cSld>
     <p:spTree>
       <p:nvGrpSpPr>
@@ -54010,7 +54061,7 @@
 </file>
 
 <file path=ppt/slides/slide8.xml><?xml version="1.0" encoding="utf-8"?>
-<p:sld xmlns:a="http://schemas.openxmlformats.org/drawingml/2006/main" xmlns:r="http://schemas.openxmlformats.org/officeDocument/2006/relationships" xmlns:p="http://schemas.openxmlformats.org/presentationml/2006/main">
+<p:sld xmlns:a="http://schemas.openxmlformats.org/drawingml/2006/main" xmlns:r="http://schemas.openxmlformats.org/officeDocument/2006/relationships" xmlns:p="http://schemas.openxmlformats.org/presentationml/2006/main" show="0">
   <p:cSld>
     <p:spTree>
       <p:nvGrpSpPr>
@@ -54069,7 +54120,7 @@
 </file>
 
 <file path=ppt/slides/slide9.xml><?xml version="1.0" encoding="utf-8"?>
-<p:sld xmlns:a="http://schemas.openxmlformats.org/drawingml/2006/main" xmlns:r="http://schemas.openxmlformats.org/officeDocument/2006/relationships" xmlns:p="http://schemas.openxmlformats.org/presentationml/2006/main">
+<p:sld xmlns:a="http://schemas.openxmlformats.org/drawingml/2006/main" xmlns:r="http://schemas.openxmlformats.org/officeDocument/2006/relationships" xmlns:p="http://schemas.openxmlformats.org/presentationml/2006/main" show="0">
   <p:cSld>
     <p:spTree>
       <p:nvGrpSpPr>

--- a/day-1/Using Kubernetes Day 1.pptx
+++ b/day-1/Using Kubernetes Day 1.pptx
@@ -24912,12 +24912,17 @@
             </a:pPr>
             <a:r>
               <a:rPr lang="en-US" sz="3600" i="1" dirty="0"/>
-              <a:t>    a single instance of an application in </a:t>
+              <a:t>    a single instance of an application </a:t>
             </a:r>
             <a:r>
-              <a:rPr lang="en-US" sz="3600" i="1" dirty="0" err="1"/>
-              <a:t>Kubernetes</a:t>
+              <a:rPr lang="en-US" sz="3600" i="1"/>
+              <a:t>in Kubernetes</a:t>
             </a:r>
+          </a:p>
+          <a:p>
+            <a:pPr marL="0" indent="0">
+              <a:buNone/>
+            </a:pPr>
             <a:endParaRPr lang="en-US" sz="3600" dirty="0"/>
           </a:p>
           <a:p>
